--- a/dist/초3/국어/발표와쓰기/초3_국어_발표와쓰기_01_조사한내용발표하기.pptx
+++ b/dist/초3/국어/발표와쓰기/초3_국어_발표와쓰기_01_조사한내용발표하기.pptx
@@ -119,39 +119,39 @@
   <p:extLst>
     <p:ext uri="{521415D9-36F7-43E2-AB2F-B90AF26B5E84}">
       <p14:sectionLst xmlns:p14="http://schemas.microsoft.com/office/powerpoint/2010/main">
-        <p14:section name="도입" id="{ab38f04a-281b-5c87-6ad6-da9a33f1b66f}">
+        <p14:section name="도입" id="{693bec3d-73d8-5a8e-a887-6a554ccc16e9}">
           <p14:sldIdLst>
             <p14:sldId id="256"/>
             <p14:sldId id="257"/>
           </p14:sldIdLst>
         </p14:section>
-        <p14:section name="개념" id="{d0834e01-af9d-eec9-b536-a146c708de0b}">
+        <p14:section name="개념" id="{68b7e1fd-1f8b-f387-8d91-20b9cd0f7c3f}">
           <p14:sldIdLst>
             <p14:sldId id="258"/>
             <p14:sldId id="259"/>
             <p14:sldId id="260"/>
           </p14:sldIdLst>
         </p14:section>
-        <p14:section name="연습" id="{5767980b-82f6-2d63-89c5-1c944bb44d0a}">
+        <p14:section name="연습" id="{610a61f5-255c-dc86-056f-6d014d31f760}">
           <p14:sldIdLst>
             <p14:sldId id="261"/>
             <p14:sldId id="262"/>
             <p14:sldId id="263"/>
           </p14:sldIdLst>
         </p14:section>
-        <p14:section name="확인" id="{92d1b7ba-2dee-4812-dc6d-977c518fa205}">
+        <p14:section name="확인" id="{89c28190-0698-d40a-9ef0-974778346167}">
           <p14:sldIdLst>
             <p14:sldId id="264"/>
             <p14:sldId id="265"/>
             <p14:sldId id="266"/>
           </p14:sldIdLst>
         </p14:section>
-        <p14:section name="정리" id="{5ada5bf7-6a9e-8257-28ed-eb276ef902da}">
+        <p14:section name="정리" id="{ac93d317-9d36-8917-73c2-89e2d7cecfa0}">
           <p14:sldIdLst>
             <p14:sldId id="267"/>
           </p14:sldIdLst>
         </p14:section>
-        <p14:section name="보충" id="{95b1422c-fd95-b97d-8338-8420ac422154}">
+        <p14:section name="보충" id="{8a79616c-c70b-fa8f-a6e8-1b2e25098bd6}">
           <p14:sldIdLst>
             <p14:sldId id="268"/>
           </p14:sldIdLst>
@@ -2853,7 +2853,7 @@
           <a:bodyPr wrap="square" lIns="0" tIns="0" rIns="0" bIns="0" rtlCol="0" anchor="ctr"/>
           <a:lstStyle/>
           <a:p>
-            <a:pPr algn="l" indent="0" marL="0">
+            <a:pPr eaLnBrk="0" algn="l" indent="0" marL="0">
               <a:buNone/>
             </a:pPr>
             <a:r>
@@ -2894,7 +2894,7 @@
           <a:bodyPr wrap="square" lIns="0" tIns="0" rIns="0" bIns="0" rtlCol="0" anchor="t"/>
           <a:lstStyle/>
           <a:p>
-            <a:pPr indent="0" marL="0">
+            <a:pPr eaLnBrk="0" indent="0" marL="0">
               <a:buNone/>
             </a:pPr>
             <a:r>
@@ -2911,7 +2911,7 @@
             <a:endParaRPr lang="ko-KR" sz="3000" dirty="0"/>
           </a:p>
           <a:p>
-            <a:pPr indent="0" marL="0">
+            <a:pPr eaLnBrk="0" indent="0" marL="0">
               <a:buNone/>
             </a:pPr>
             <a:r>
@@ -2977,7 +2977,7 @@
           <a:bodyPr wrap="square" lIns="0" tIns="0" rIns="0" bIns="0" rtlCol="0" anchor="ctr"/>
           <a:lstStyle/>
           <a:p>
-            <a:pPr indent="0" marL="0">
+            <a:pPr eaLnBrk="0" indent="0" marL="0">
               <a:spcAft>
                 <a:spcPts val="600"/>
               </a:spcAft>
@@ -2997,7 +2997,7 @@
             <a:endParaRPr lang="ko-KR" sz="3000" dirty="0"/>
           </a:p>
           <a:p>
-            <a:pPr indent="0" marL="0">
+            <a:pPr eaLnBrk="0" indent="0" marL="0">
               <a:spcAft>
                 <a:spcPts val="600"/>
               </a:spcAft>
@@ -3017,7 +3017,7 @@
             <a:endParaRPr lang="ko-KR" sz="3000" dirty="0"/>
           </a:p>
           <a:p>
-            <a:pPr indent="0" marL="0">
+            <a:pPr eaLnBrk="0" indent="0" marL="0">
               <a:spcAft>
                 <a:spcPts val="600"/>
               </a:spcAft>
@@ -3086,7 +3086,7 @@
           <a:bodyPr wrap="square" lIns="0" tIns="0" rIns="0" bIns="0" rtlCol="0" anchor="ctr"/>
           <a:lstStyle/>
           <a:p>
-            <a:pPr algn="l" indent="0" marL="0">
+            <a:pPr eaLnBrk="0" algn="l" indent="0" marL="0">
               <a:buNone/>
             </a:pPr>
             <a:r>
@@ -3152,7 +3152,7 @@
           <a:bodyPr wrap="square" lIns="0" tIns="0" rIns="0" bIns="0" rtlCol="0" anchor="ctr"/>
           <a:lstStyle/>
           <a:p>
-            <a:pPr indent="0" marL="0">
+            <a:pPr eaLnBrk="0" indent="0" marL="0">
               <a:spcAft>
                 <a:spcPts val="600"/>
               </a:spcAft>
@@ -3202,7 +3202,7 @@
           <a:bodyPr wrap="square" lIns="177800" tIns="0" rIns="177800" bIns="0" rtlCol="0" anchor="ctr"/>
           <a:lstStyle/>
           <a:p>
-            <a:pPr algn="l" indent="0" marL="0">
+            <a:pPr eaLnBrk="0" algn="l" indent="0" marL="0">
               <a:buNone/>
             </a:pPr>
             <a:r>
@@ -3241,7 +3241,7 @@
           <a:bodyPr wrap="square" lIns="0" tIns="0" rIns="0" bIns="0" rtlCol="0" anchor="ctr"/>
           <a:lstStyle/>
           <a:p>
-            <a:pPr algn="l" indent="0" marL="0">
+            <a:pPr eaLnBrk="0" algn="l" indent="0" marL="0">
               <a:buNone/>
             </a:pPr>
             <a:r>
@@ -3280,7 +3280,7 @@
           <a:bodyPr wrap="square" lIns="0" tIns="0" rIns="0" bIns="0" rtlCol="0" anchor="ctr"/>
           <a:lstStyle/>
           <a:p>
-            <a:pPr algn="l" indent="0" marL="0">
+            <a:pPr eaLnBrk="0" algn="l" indent="0" marL="0">
               <a:buNone/>
             </a:pPr>
             <a:r>
@@ -3319,7 +3319,7 @@
           <a:bodyPr wrap="square" lIns="0" tIns="0" rIns="0" bIns="0" rtlCol="0" anchor="ctr"/>
           <a:lstStyle/>
           <a:p>
-            <a:pPr algn="l" indent="0" marL="0">
+            <a:pPr eaLnBrk="0" algn="l" indent="0" marL="0">
               <a:buNone/>
             </a:pPr>
             <a:r>
@@ -3366,7 +3366,7 @@
           <a:bodyPr wrap="square" lIns="177800" tIns="0" rIns="177800" bIns="0" rtlCol="0" anchor="ctr"/>
           <a:lstStyle/>
           <a:p>
-            <a:pPr algn="l" indent="0" marL="0">
+            <a:pPr eaLnBrk="0" algn="l" indent="0" marL="0">
               <a:buNone/>
             </a:pPr>
             <a:r>
@@ -3405,7 +3405,7 @@
           <a:bodyPr wrap="square" lIns="0" tIns="0" rIns="0" bIns="0" rtlCol="0" anchor="ctr"/>
           <a:lstStyle/>
           <a:p>
-            <a:pPr algn="l" indent="0" marL="0">
+            <a:pPr eaLnBrk="0" algn="l" indent="0" marL="0">
               <a:buNone/>
             </a:pPr>
             <a:r>
@@ -3444,7 +3444,7 @@
           <a:bodyPr wrap="square" lIns="0" tIns="0" rIns="0" bIns="0" rtlCol="0" anchor="ctr"/>
           <a:lstStyle/>
           <a:p>
-            <a:pPr algn="l" indent="0" marL="0">
+            <a:pPr eaLnBrk="0" algn="l" indent="0" marL="0">
               <a:buNone/>
             </a:pPr>
             <a:r>
@@ -3483,7 +3483,7 @@
           <a:bodyPr wrap="square" lIns="0" tIns="0" rIns="0" bIns="0" rtlCol="0" anchor="ctr"/>
           <a:lstStyle/>
           <a:p>
-            <a:pPr algn="l" indent="0" marL="0">
+            <a:pPr eaLnBrk="0" algn="l" indent="0" marL="0">
               <a:buNone/>
             </a:pPr>
             <a:r>
@@ -3540,7 +3540,7 @@
             </a:lvl1pPr>
           </a:lstStyle>
           <a:p>
-            <a:pPr algn="r"/>
+            <a:pPr eaLnBrk="0" algn="r"/>
             <a:fld id="{F7021451-1387-4CA6-816F-3879F97B5CBC}" type="slidenum">
               <a:rPr b="0" lang="en-US"/>
               <a:t>10</a:t>
@@ -3597,7 +3597,7 @@
           <a:bodyPr wrap="square" lIns="0" tIns="0" rIns="0" bIns="0" rtlCol="0" anchor="ctr"/>
           <a:lstStyle/>
           <a:p>
-            <a:pPr algn="l" indent="0" marL="0">
+            <a:pPr eaLnBrk="0" algn="l" indent="0" marL="0">
               <a:buNone/>
             </a:pPr>
             <a:r>
@@ -3663,7 +3663,7 @@
           <a:bodyPr wrap="square" lIns="0" tIns="0" rIns="0" bIns="0" rtlCol="0" anchor="ctr"/>
           <a:lstStyle/>
           <a:p>
-            <a:pPr indent="0" marL="0">
+            <a:pPr eaLnBrk="0" indent="0" marL="0">
               <a:spcAft>
                 <a:spcPts val="600"/>
               </a:spcAft>
@@ -3713,7 +3713,7 @@
           <a:bodyPr wrap="square" lIns="0" tIns="0" rIns="0" bIns="0" rtlCol="0" anchor="ctr"/>
           <a:lstStyle/>
           <a:p>
-            <a:pPr algn="ctr" indent="0" marL="0">
+            <a:pPr eaLnBrk="0" algn="ctr" indent="0" marL="0">
               <a:buNone/>
             </a:pPr>
             <a:r>
@@ -3779,7 +3779,7 @@
           <a:bodyPr wrap="square" lIns="0" tIns="0" rIns="0" bIns="0" rtlCol="0" anchor="ctr"/>
           <a:lstStyle/>
           <a:p>
-            <a:pPr indent="0" marL="0">
+            <a:pPr eaLnBrk="0" indent="0" marL="0">
               <a:spcAft>
                 <a:spcPts val="600"/>
               </a:spcAft>
@@ -3799,7 +3799,7 @@
             <a:endParaRPr lang="ko-KR" sz="3000" dirty="0"/>
           </a:p>
           <a:p>
-            <a:pPr indent="0" marL="0">
+            <a:pPr eaLnBrk="0" indent="0" marL="0">
               <a:spcAft>
                 <a:spcPts val="600"/>
               </a:spcAft>
@@ -3819,7 +3819,7 @@
             <a:endParaRPr lang="ko-KR" sz="3000" dirty="0"/>
           </a:p>
           <a:p>
-            <a:pPr indent="0" marL="0">
+            <a:pPr eaLnBrk="0" indent="0" marL="0">
               <a:spcAft>
                 <a:spcPts val="600"/>
               </a:spcAft>
@@ -3869,7 +3869,7 @@
           <a:bodyPr wrap="square" lIns="0" tIns="0" rIns="0" bIns="0" rtlCol="0" anchor="ctr"/>
           <a:lstStyle/>
           <a:p>
-            <a:pPr algn="ctr" indent="0" marL="0">
+            <a:pPr eaLnBrk="0" algn="ctr" indent="0" marL="0">
               <a:buNone/>
             </a:pPr>
             <a:r>
@@ -3935,7 +3935,7 @@
           <a:bodyPr wrap="square" lIns="0" tIns="0" rIns="0" bIns="0" rtlCol="0" anchor="ctr"/>
           <a:lstStyle/>
           <a:p>
-            <a:pPr indent="0" marL="0">
+            <a:pPr eaLnBrk="0" indent="0" marL="0">
               <a:spcAft>
                 <a:spcPts val="600"/>
               </a:spcAft>
@@ -3955,7 +3955,7 @@
             <a:endParaRPr lang="ko-KR" sz="3000" dirty="0"/>
           </a:p>
           <a:p>
-            <a:pPr indent="0" marL="0">
+            <a:pPr eaLnBrk="0" indent="0" marL="0">
               <a:spcAft>
                 <a:spcPts val="600"/>
               </a:spcAft>
@@ -3975,7 +3975,7 @@
             <a:endParaRPr lang="ko-KR" sz="3000" dirty="0"/>
           </a:p>
           <a:p>
-            <a:pPr indent="0" marL="0">
+            <a:pPr eaLnBrk="0" indent="0" marL="0">
               <a:spcAft>
                 <a:spcPts val="600"/>
               </a:spcAft>
@@ -4025,7 +4025,7 @@
           <a:bodyPr wrap="square" lIns="0" tIns="0" rIns="0" bIns="0" rtlCol="0" anchor="ctr"/>
           <a:lstStyle/>
           <a:p>
-            <a:pPr algn="ctr" indent="0" marL="0">
+            <a:pPr eaLnBrk="0" algn="ctr" indent="0" marL="0">
               <a:buNone/>
             </a:pPr>
             <a:r>
@@ -4091,7 +4091,7 @@
           <a:bodyPr wrap="square" lIns="0" tIns="0" rIns="0" bIns="0" rtlCol="0" anchor="ctr"/>
           <a:lstStyle/>
           <a:p>
-            <a:pPr indent="0" marL="0">
+            <a:pPr eaLnBrk="0" indent="0" marL="0">
               <a:spcAft>
                 <a:spcPts val="600"/>
               </a:spcAft>
@@ -4111,7 +4111,7 @@
             <a:endParaRPr lang="ko-KR" sz="3000" dirty="0"/>
           </a:p>
           <a:p>
-            <a:pPr indent="0" marL="0">
+            <a:pPr eaLnBrk="0" indent="0" marL="0">
               <a:spcAft>
                 <a:spcPts val="600"/>
               </a:spcAft>
@@ -4131,7 +4131,7 @@
             <a:endParaRPr lang="ko-KR" sz="3000" dirty="0"/>
           </a:p>
           <a:p>
-            <a:pPr indent="0" marL="0">
+            <a:pPr eaLnBrk="0" indent="0" marL="0">
               <a:spcAft>
                 <a:spcPts val="600"/>
               </a:spcAft>
@@ -4151,7 +4151,7 @@
             <a:endParaRPr lang="ko-KR" sz="3000" dirty="0"/>
           </a:p>
           <a:p>
-            <a:pPr indent="0" marL="0">
+            <a:pPr eaLnBrk="0" indent="0" marL="0">
               <a:spcAft>
                 <a:spcPts val="600"/>
               </a:spcAft>
@@ -4211,7 +4211,7 @@
             </a:lvl1pPr>
           </a:lstStyle>
           <a:p>
-            <a:pPr algn="r"/>
+            <a:pPr eaLnBrk="0" algn="r"/>
             <a:fld id="{F7021451-1387-4CA6-816F-3879F97B5CBC}" type="slidenum">
               <a:rPr b="0" lang="en-US"/>
               <a:t>11</a:t>
@@ -4268,7 +4268,7 @@
           <a:bodyPr wrap="square" lIns="0" tIns="0" rIns="0" bIns="0" rtlCol="0" anchor="ctr"/>
           <a:lstStyle/>
           <a:p>
-            <a:pPr algn="l" indent="0" marL="0">
+            <a:pPr eaLnBrk="0" algn="l" indent="0" marL="0">
               <a:buNone/>
             </a:pPr>
             <a:r>
@@ -4334,7 +4334,7 @@
           <a:bodyPr wrap="square" lIns="0" tIns="0" rIns="0" bIns="0" rtlCol="0" anchor="ctr"/>
           <a:lstStyle/>
           <a:p>
-            <a:pPr indent="0" marL="0">
+            <a:pPr eaLnBrk="0" indent="0" marL="0">
               <a:spcAft>
                 <a:spcPts val="600"/>
               </a:spcAft>
@@ -4354,7 +4354,7 @@
             <a:endParaRPr lang="ko-KR" sz="3000" dirty="0"/>
           </a:p>
           <a:p>
-            <a:pPr indent="0" marL="0">
+            <a:pPr eaLnBrk="0" indent="0" marL="0">
               <a:spcAft>
                 <a:spcPts val="600"/>
               </a:spcAft>
@@ -4404,7 +4404,7 @@
           <a:bodyPr wrap="square" lIns="177800" tIns="0" rIns="177800" bIns="0" rtlCol="0" anchor="ctr"/>
           <a:lstStyle/>
           <a:p>
-            <a:pPr algn="l" indent="0" marL="0">
+            <a:pPr eaLnBrk="0" algn="l" indent="0" marL="0">
               <a:buNone/>
             </a:pPr>
             <a:r>
@@ -4451,7 +4451,7 @@
           <a:bodyPr wrap="square" lIns="177800" tIns="0" rIns="177800" bIns="0" rtlCol="0" anchor="ctr"/>
           <a:lstStyle/>
           <a:p>
-            <a:pPr algn="l" indent="0" marL="0">
+            <a:pPr eaLnBrk="0" algn="l" indent="0" marL="0">
               <a:buNone/>
             </a:pPr>
             <a:r>
@@ -4490,7 +4490,7 @@
           <a:bodyPr wrap="square" lIns="0" tIns="0" rIns="0" bIns="0" rtlCol="0" anchor="t"/>
           <a:lstStyle/>
           <a:p>
-            <a:pPr algn="l" indent="0" marL="0">
+            <a:pPr eaLnBrk="0" algn="l" indent="0" marL="0">
               <a:buNone/>
             </a:pPr>
             <a:r>
@@ -4529,7 +4529,7 @@
           <a:bodyPr wrap="square" lIns="0" tIns="0" rIns="0" bIns="0" rtlCol="0" anchor="ctr"/>
           <a:lstStyle/>
           <a:p>
-            <a:pPr algn="l" indent="0" marL="0">
+            <a:pPr eaLnBrk="0" algn="l" indent="0" marL="0">
               <a:buNone/>
             </a:pPr>
             <a:r>
@@ -4568,7 +4568,7 @@
           <a:bodyPr wrap="square" lIns="0" tIns="0" rIns="0" bIns="0" rtlCol="0" anchor="ctr"/>
           <a:lstStyle/>
           <a:p>
-            <a:pPr algn="l" indent="0" marL="0">
+            <a:pPr eaLnBrk="0" algn="l" indent="0" marL="0">
               <a:buNone/>
             </a:pPr>
             <a:r>
@@ -4607,7 +4607,7 @@
           <a:bodyPr wrap="square" lIns="0" tIns="0" rIns="0" bIns="0" rtlCol="0" anchor="ctr"/>
           <a:lstStyle/>
           <a:p>
-            <a:pPr algn="l" indent="0" marL="0">
+            <a:pPr eaLnBrk="0" algn="l" indent="0" marL="0">
               <a:buNone/>
             </a:pPr>
             <a:r>
@@ -4646,7 +4646,7 @@
           <a:bodyPr wrap="square" lIns="0" tIns="0" rIns="0" bIns="0" rtlCol="0" anchor="ctr"/>
           <a:lstStyle/>
           <a:p>
-            <a:pPr algn="l" indent="0" marL="0">
+            <a:pPr eaLnBrk="0" algn="l" indent="0" marL="0">
               <a:buNone/>
             </a:pPr>
             <a:r>
@@ -4703,7 +4703,7 @@
             </a:lvl1pPr>
           </a:lstStyle>
           <a:p>
-            <a:pPr algn="r"/>
+            <a:pPr eaLnBrk="0" algn="r"/>
             <a:fld id="{F7021451-1387-4CA6-816F-3879F97B5CBC}" type="slidenum">
               <a:rPr b="0" lang="en-US"/>
               <a:t>12</a:t>
@@ -4760,7 +4760,7 @@
           <a:bodyPr wrap="square" lIns="0" tIns="0" rIns="0" bIns="0" rtlCol="0" anchor="ctr"/>
           <a:lstStyle/>
           <a:p>
-            <a:pPr algn="l" indent="0" marL="0">
+            <a:pPr eaLnBrk="0" algn="l" indent="0" marL="0">
               <a:buNone/>
             </a:pPr>
             <a:r>
@@ -4799,7 +4799,7 @@
           <a:bodyPr wrap="square" lIns="0" tIns="0" rIns="0" bIns="0" rtlCol="0" anchor="ctr"/>
           <a:lstStyle/>
           <a:p>
-            <a:pPr algn="l" indent="0" marL="0">
+            <a:pPr eaLnBrk="0" algn="l" indent="0" marL="0">
               <a:buNone/>
             </a:pPr>
             <a:r>
@@ -4865,7 +4865,7 @@
           <a:bodyPr wrap="square" lIns="0" tIns="0" rIns="0" bIns="0" rtlCol="0" anchor="ctr"/>
           <a:lstStyle/>
           <a:p>
-            <a:pPr indent="0" marL="0">
+            <a:pPr eaLnBrk="0" indent="0" marL="0">
               <a:spcAft>
                 <a:spcPts val="600"/>
               </a:spcAft>
@@ -4915,7 +4915,7 @@
           <a:bodyPr wrap="square" lIns="76200" tIns="50800" rIns="76200" bIns="50800" rtlCol="0" anchor="ctr"/>
           <a:lstStyle/>
           <a:p>
-            <a:pPr algn="ctr" indent="0" marL="0">
+            <a:pPr eaLnBrk="0" algn="ctr" indent="0" marL="0">
               <a:buNone/>
             </a:pPr>
             <a:r>
@@ -4932,7 +4932,7 @@
             <a:endParaRPr lang="ko-KR" sz="2400" dirty="0"/>
           </a:p>
           <a:p>
-            <a:pPr algn="ctr" indent="0" marL="0">
+            <a:pPr eaLnBrk="0" algn="ctr" indent="0" marL="0">
               <a:buNone/>
             </a:pPr>
             <a:r>
@@ -4949,7 +4949,7 @@
             <a:endParaRPr lang="ko-KR" sz="2400" dirty="0"/>
           </a:p>
           <a:p>
-            <a:pPr algn="ctr" indent="0" marL="0">
+            <a:pPr eaLnBrk="0" algn="ctr" indent="0" marL="0">
               <a:buNone/>
             </a:pPr>
             <a:r>
@@ -4966,7 +4966,7 @@
             <a:endParaRPr lang="ko-KR" sz="2400" dirty="0"/>
           </a:p>
           <a:p>
-            <a:pPr algn="ctr" indent="0" marL="0">
+            <a:pPr eaLnBrk="0" algn="ctr" indent="0" marL="0">
               <a:buNone/>
             </a:pPr>
             <a:r>
@@ -5037,7 +5037,7 @@
           <a:bodyPr wrap="square" lIns="76200" tIns="50800" rIns="76200" bIns="50800" rtlCol="0" anchor="ctr"/>
           <a:lstStyle/>
           <a:p>
-            <a:pPr algn="ctr" indent="0" marL="0">
+            <a:pPr eaLnBrk="0" algn="ctr" indent="0" marL="0">
               <a:buNone/>
             </a:pPr>
             <a:r>
@@ -5054,7 +5054,7 @@
             <a:endParaRPr lang="ko-KR" sz="2400" dirty="0"/>
           </a:p>
           <a:p>
-            <a:pPr algn="ctr" indent="0" marL="0">
+            <a:pPr eaLnBrk="0" algn="ctr" indent="0" marL="0">
               <a:buNone/>
             </a:pPr>
             <a:r>
@@ -5125,7 +5125,7 @@
           <a:bodyPr wrap="square" lIns="76200" tIns="50800" rIns="76200" bIns="50800" rtlCol="0" anchor="ctr"/>
           <a:lstStyle/>
           <a:p>
-            <a:pPr algn="ctr" indent="0" marL="0">
+            <a:pPr eaLnBrk="0" algn="ctr" indent="0" marL="0">
               <a:buNone/>
             </a:pPr>
             <a:r>
@@ -5142,7 +5142,7 @@
             <a:endParaRPr lang="ko-KR" sz="2400" dirty="0"/>
           </a:p>
           <a:p>
-            <a:pPr algn="ctr" indent="0" marL="0">
+            <a:pPr eaLnBrk="0" algn="ctr" indent="0" marL="0">
               <a:buNone/>
             </a:pPr>
             <a:r>
@@ -5159,7 +5159,7 @@
             <a:endParaRPr lang="ko-KR" sz="2400" dirty="0"/>
           </a:p>
           <a:p>
-            <a:pPr algn="ctr" indent="0" marL="0">
+            <a:pPr eaLnBrk="0" algn="ctr" indent="0" marL="0">
               <a:buNone/>
             </a:pPr>
             <a:r>
@@ -5216,7 +5216,7 @@
             </a:lvl1pPr>
           </a:lstStyle>
           <a:p>
-            <a:pPr algn="r"/>
+            <a:pPr eaLnBrk="0" algn="r"/>
             <a:fld id="{F7021451-1387-4CA6-816F-3879F97B5CBC}" type="slidenum">
               <a:rPr b="0" lang="en-US"/>
               <a:t>13</a:t>
@@ -5273,7 +5273,7 @@
           <a:bodyPr wrap="square" lIns="0" tIns="0" rIns="0" bIns="0" rtlCol="0" anchor="ctr"/>
           <a:lstStyle/>
           <a:p>
-            <a:pPr algn="l" indent="0" marL="0">
+            <a:pPr eaLnBrk="0" algn="l" indent="0" marL="0">
               <a:buNone/>
             </a:pPr>
             <a:r>
@@ -5312,7 +5312,7 @@
           <a:bodyPr wrap="square" lIns="0" tIns="0" rIns="0" bIns="0" rtlCol="0" anchor="ctr"/>
           <a:lstStyle/>
           <a:p>
-            <a:pPr algn="l" indent="0" marL="0">
+            <a:pPr eaLnBrk="0" algn="l" indent="0" marL="0">
               <a:buNone/>
             </a:pPr>
             <a:r>
@@ -5359,7 +5359,7 @@
           <a:bodyPr wrap="square" lIns="0" tIns="0" rIns="0" bIns="0" rtlCol="0" anchor="ctr"/>
           <a:lstStyle/>
           <a:p>
-            <a:pPr algn="ctr" indent="0" marL="0">
+            <a:pPr eaLnBrk="0" algn="ctr" indent="0" marL="0">
               <a:buNone/>
             </a:pPr>
             <a:r>
@@ -5398,7 +5398,7 @@
           <a:bodyPr wrap="square" lIns="0" tIns="0" rIns="0" bIns="0" rtlCol="0" anchor="ctr"/>
           <a:lstStyle/>
           <a:p>
-            <a:pPr algn="l" indent="0" marL="0">
+            <a:pPr eaLnBrk="0" algn="l" indent="0" marL="0">
               <a:buNone/>
             </a:pPr>
             <a:r>
@@ -5445,7 +5445,7 @@
           <a:bodyPr wrap="square" lIns="0" tIns="0" rIns="0" bIns="0" rtlCol="0" anchor="ctr"/>
           <a:lstStyle/>
           <a:p>
-            <a:pPr algn="ctr" indent="0" marL="0">
+            <a:pPr eaLnBrk="0" algn="ctr" indent="0" marL="0">
               <a:buNone/>
             </a:pPr>
             <a:r>
@@ -5484,7 +5484,7 @@
           <a:bodyPr wrap="square" lIns="0" tIns="0" rIns="0" bIns="0" rtlCol="0" anchor="ctr"/>
           <a:lstStyle/>
           <a:p>
-            <a:pPr algn="l" indent="0" marL="0">
+            <a:pPr eaLnBrk="0" algn="l" indent="0" marL="0">
               <a:buNone/>
             </a:pPr>
             <a:r>
@@ -5541,7 +5541,7 @@
             </a:lvl1pPr>
           </a:lstStyle>
           <a:p>
-            <a:pPr algn="r"/>
+            <a:pPr eaLnBrk="0" algn="r"/>
             <a:fld id="{F7021451-1387-4CA6-816F-3879F97B5CBC}" type="slidenum">
               <a:rPr b="0" lang="en-US"/>
               <a:t>2</a:t>
@@ -5598,7 +5598,7 @@
           <a:bodyPr wrap="square" lIns="0" tIns="0" rIns="0" bIns="0" rtlCol="0" anchor="ctr"/>
           <a:lstStyle/>
           <a:p>
-            <a:pPr algn="l" indent="0" marL="0">
+            <a:pPr eaLnBrk="0" algn="l" indent="0" marL="0">
               <a:buNone/>
             </a:pPr>
             <a:r>
@@ -5664,7 +5664,7 @@
           <a:bodyPr wrap="square" lIns="0" tIns="0" rIns="0" bIns="0" rtlCol="0" anchor="ctr"/>
           <a:lstStyle/>
           <a:p>
-            <a:pPr indent="0" marL="0">
+            <a:pPr eaLnBrk="0" indent="0" marL="0">
               <a:spcAft>
                 <a:spcPts val="600"/>
               </a:spcAft>
@@ -5733,7 +5733,7 @@
           <a:bodyPr wrap="square" lIns="0" tIns="0" rIns="0" bIns="0" rtlCol="0" anchor="ctr"/>
           <a:lstStyle/>
           <a:p>
-            <a:pPr indent="0" marL="0">
+            <a:pPr eaLnBrk="0" indent="0" marL="0">
               <a:spcAft>
                 <a:spcPts val="600"/>
               </a:spcAft>
@@ -5753,7 +5753,7 @@
             <a:endParaRPr lang="ko-KR" sz="3000" dirty="0"/>
           </a:p>
           <a:p>
-            <a:pPr indent="0" marL="0">
+            <a:pPr eaLnBrk="0" indent="0" marL="0">
               <a:spcAft>
                 <a:spcPts val="600"/>
               </a:spcAft>
@@ -5822,7 +5822,7 @@
           <a:bodyPr wrap="square" lIns="0" tIns="0" rIns="0" bIns="0" rtlCol="0" anchor="ctr"/>
           <a:lstStyle/>
           <a:p>
-            <a:pPr indent="0" marL="0">
+            <a:pPr eaLnBrk="0" indent="0" marL="0">
               <a:spcAft>
                 <a:spcPts val="600"/>
               </a:spcAft>
@@ -5842,7 +5842,7 @@
             <a:endParaRPr lang="ko-KR" sz="3000" dirty="0"/>
           </a:p>
           <a:p>
-            <a:pPr indent="0" marL="0">
+            <a:pPr eaLnBrk="0" indent="0" marL="0">
               <a:spcAft>
                 <a:spcPts val="600"/>
               </a:spcAft>
@@ -5911,7 +5911,7 @@
           <a:bodyPr wrap="square" lIns="0" tIns="0" rIns="0" bIns="0" rtlCol="0" anchor="ctr"/>
           <a:lstStyle/>
           <a:p>
-            <a:pPr indent="0" marL="0">
+            <a:pPr eaLnBrk="0" indent="0" marL="0">
               <a:spcAft>
                 <a:spcPts val="600"/>
               </a:spcAft>
@@ -5931,7 +5931,7 @@
             <a:endParaRPr lang="ko-KR" sz="3000" dirty="0"/>
           </a:p>
           <a:p>
-            <a:pPr indent="0" marL="0">
+            <a:pPr eaLnBrk="0" indent="0" marL="0">
               <a:spcAft>
                 <a:spcPts val="600"/>
               </a:spcAft>
@@ -5991,7 +5991,7 @@
             </a:lvl1pPr>
           </a:lstStyle>
           <a:p>
-            <a:pPr algn="r"/>
+            <a:pPr eaLnBrk="0" algn="r"/>
             <a:fld id="{F7021451-1387-4CA6-816F-3879F97B5CBC}" type="slidenum">
               <a:rPr b="0" lang="en-US"/>
               <a:t>3</a:t>
@@ -6048,7 +6048,7 @@
           <a:bodyPr wrap="square" lIns="0" tIns="0" rIns="0" bIns="0" rtlCol="0" anchor="ctr"/>
           <a:lstStyle/>
           <a:p>
-            <a:pPr algn="l" indent="0" marL="0">
+            <a:pPr eaLnBrk="0" algn="l" indent="0" marL="0">
               <a:buNone/>
             </a:pPr>
             <a:r>
@@ -6114,7 +6114,7 @@
           <a:bodyPr wrap="square" lIns="0" tIns="0" rIns="0" bIns="0" rtlCol="0" anchor="ctr"/>
           <a:lstStyle/>
           <a:p>
-            <a:pPr indent="0" marL="0">
+            <a:pPr eaLnBrk="0" indent="0" marL="0">
               <a:spcAft>
                 <a:spcPts val="600"/>
               </a:spcAft>
@@ -6183,7 +6183,7 @@
           <a:bodyPr wrap="square" lIns="0" tIns="0" rIns="0" bIns="0" rtlCol="0" anchor="t"/>
           <a:lstStyle/>
           <a:p>
-            <a:pPr indent="0" marL="0">
+            <a:pPr eaLnBrk="0" algn="l" indent="0" marL="0">
               <a:lnSpc>
                 <a:spcPct val="105000"/>
               </a:lnSpc>
@@ -6206,7 +6206,7 @@
             <a:endParaRPr lang="ko-KR" sz="2800" dirty="0"/>
           </a:p>
           <a:p>
-            <a:pPr indent="0" marL="0">
+            <a:pPr eaLnBrk="0" algn="l" indent="0" marL="0">
               <a:lnSpc>
                 <a:spcPct val="105000"/>
               </a:lnSpc>
@@ -6229,7 +6229,7 @@
             <a:endParaRPr lang="ko-KR" sz="2800" dirty="0"/>
           </a:p>
           <a:p>
-            <a:pPr indent="0" marL="0">
+            <a:pPr eaLnBrk="0" algn="l" indent="0" marL="0">
               <a:lnSpc>
                 <a:spcPct val="105000"/>
               </a:lnSpc>
@@ -6292,7 +6292,7 @@
             </a:lvl1pPr>
           </a:lstStyle>
           <a:p>
-            <a:pPr algn="r"/>
+            <a:pPr eaLnBrk="0" algn="r"/>
             <a:fld id="{F7021451-1387-4CA6-816F-3879F97B5CBC}" type="slidenum">
               <a:rPr b="0" lang="en-US"/>
               <a:t>4</a:t>
@@ -6349,7 +6349,7 @@
           <a:bodyPr wrap="square" lIns="0" tIns="0" rIns="0" bIns="0" rtlCol="0" anchor="ctr"/>
           <a:lstStyle/>
           <a:p>
-            <a:pPr algn="l" indent="0" marL="0">
+            <a:pPr eaLnBrk="0" algn="l" indent="0" marL="0">
               <a:buNone/>
             </a:pPr>
             <a:r>
@@ -6415,7 +6415,7 @@
           <a:bodyPr wrap="square" lIns="0" tIns="0" rIns="0" bIns="0" rtlCol="0" anchor="ctr"/>
           <a:lstStyle/>
           <a:p>
-            <a:pPr indent="0" marL="0">
+            <a:pPr eaLnBrk="0" indent="0" marL="0">
               <a:spcAft>
                 <a:spcPts val="600"/>
               </a:spcAft>
@@ -6435,7 +6435,7 @@
             <a:endParaRPr lang="ko-KR" sz="3000" dirty="0"/>
           </a:p>
           <a:p>
-            <a:pPr indent="0" marL="0">
+            <a:pPr eaLnBrk="0" indent="0" marL="0">
               <a:spcAft>
                 <a:spcPts val="600"/>
               </a:spcAft>
@@ -6504,7 +6504,7 @@
           <a:bodyPr wrap="square" lIns="0" tIns="0" rIns="0" bIns="0" rtlCol="0" anchor="ctr"/>
           <a:lstStyle/>
           <a:p>
-            <a:pPr indent="0" marL="0">
+            <a:pPr eaLnBrk="0" indent="0" marL="0">
               <a:spcAft>
                 <a:spcPts val="600"/>
               </a:spcAft>
@@ -6524,7 +6524,7 @@
             <a:endParaRPr lang="ko-KR" sz="3000" dirty="0"/>
           </a:p>
           <a:p>
-            <a:pPr indent="0" marL="0">
+            <a:pPr eaLnBrk="0" indent="0" marL="0">
               <a:spcAft>
                 <a:spcPts val="600"/>
               </a:spcAft>
@@ -6593,7 +6593,7 @@
           <a:bodyPr wrap="square" lIns="0" tIns="0" rIns="0" bIns="0" rtlCol="0" anchor="ctr"/>
           <a:lstStyle/>
           <a:p>
-            <a:pPr indent="0" marL="0">
+            <a:pPr eaLnBrk="0" indent="0" marL="0">
               <a:spcAft>
                 <a:spcPts val="600"/>
               </a:spcAft>
@@ -6613,7 +6613,7 @@
             <a:endParaRPr lang="ko-KR" sz="3000" dirty="0"/>
           </a:p>
           <a:p>
-            <a:pPr indent="0" marL="0">
+            <a:pPr eaLnBrk="0" indent="0" marL="0">
               <a:spcAft>
                 <a:spcPts val="600"/>
               </a:spcAft>
@@ -6682,7 +6682,7 @@
           <a:bodyPr wrap="square" lIns="0" tIns="0" rIns="0" bIns="0" rtlCol="0" anchor="ctr"/>
           <a:lstStyle/>
           <a:p>
-            <a:pPr indent="0" marL="0">
+            <a:pPr eaLnBrk="0" indent="0" marL="0">
               <a:spcAft>
                 <a:spcPts val="600"/>
               </a:spcAft>
@@ -6702,7 +6702,7 @@
             <a:endParaRPr lang="ko-KR" sz="3000" dirty="0"/>
           </a:p>
           <a:p>
-            <a:pPr indent="0" marL="0">
+            <a:pPr eaLnBrk="0" indent="0" marL="0">
               <a:spcAft>
                 <a:spcPts val="600"/>
               </a:spcAft>
@@ -6762,7 +6762,7 @@
             </a:lvl1pPr>
           </a:lstStyle>
           <a:p>
-            <a:pPr algn="r"/>
+            <a:pPr eaLnBrk="0" algn="r"/>
             <a:fld id="{F7021451-1387-4CA6-816F-3879F97B5CBC}" type="slidenum">
               <a:rPr b="0" lang="en-US"/>
               <a:t>5</a:t>
@@ -6819,7 +6819,7 @@
           <a:bodyPr wrap="square" lIns="0" tIns="0" rIns="0" bIns="0" rtlCol="0" anchor="ctr"/>
           <a:lstStyle/>
           <a:p>
-            <a:pPr algn="l" indent="0" marL="0">
+            <a:pPr eaLnBrk="0" algn="l" indent="0" marL="0">
               <a:buNone/>
             </a:pPr>
             <a:r>
@@ -6858,7 +6858,7 @@
           <a:bodyPr wrap="square" lIns="0" tIns="0" rIns="0" bIns="0" rtlCol="0" anchor="ctr"/>
           <a:lstStyle/>
           <a:p>
-            <a:pPr algn="l" indent="0" marL="0">
+            <a:pPr eaLnBrk="0" algn="l" indent="0" marL="0">
               <a:buNone/>
             </a:pPr>
             <a:r>
@@ -6905,7 +6905,7 @@
           <a:bodyPr wrap="square" lIns="0" tIns="0" rIns="0" bIns="0" rtlCol="0" anchor="ctr"/>
           <a:lstStyle/>
           <a:p>
-            <a:pPr algn="ctr" indent="0" marL="0">
+            <a:pPr eaLnBrk="0" algn="ctr" indent="0" marL="0">
               <a:buNone/>
             </a:pPr>
             <a:r>
@@ -6944,7 +6944,7 @@
           <a:bodyPr wrap="square" lIns="0" tIns="0" rIns="0" bIns="0" rtlCol="0" anchor="ctr"/>
           <a:lstStyle/>
           <a:p>
-            <a:pPr algn="l" indent="0" marL="0">
+            <a:pPr eaLnBrk="0" algn="l" indent="0" marL="0">
               <a:buNone/>
             </a:pPr>
             <a:r>
@@ -6991,7 +6991,7 @@
           <a:bodyPr wrap="square" lIns="0" tIns="0" rIns="0" bIns="0" rtlCol="0" anchor="ctr"/>
           <a:lstStyle/>
           <a:p>
-            <a:pPr algn="ctr" indent="0" marL="0">
+            <a:pPr eaLnBrk="0" algn="ctr" indent="0" marL="0">
               <a:buNone/>
             </a:pPr>
             <a:r>
@@ -7030,7 +7030,7 @@
           <a:bodyPr wrap="square" lIns="0" tIns="0" rIns="0" bIns="0" rtlCol="0" anchor="ctr"/>
           <a:lstStyle/>
           <a:p>
-            <a:pPr algn="l" indent="0" marL="0">
+            <a:pPr eaLnBrk="0" algn="l" indent="0" marL="0">
               <a:buNone/>
             </a:pPr>
             <a:r>
@@ -7077,7 +7077,7 @@
           <a:bodyPr wrap="square" lIns="0" tIns="0" rIns="0" bIns="0" rtlCol="0" anchor="ctr"/>
           <a:lstStyle/>
           <a:p>
-            <a:pPr algn="ctr" indent="0" marL="0">
+            <a:pPr eaLnBrk="0" algn="ctr" indent="0" marL="0">
               <a:buNone/>
             </a:pPr>
             <a:r>
@@ -7116,7 +7116,7 @@
           <a:bodyPr wrap="square" lIns="0" tIns="0" rIns="0" bIns="0" rtlCol="0" anchor="ctr"/>
           <a:lstStyle/>
           <a:p>
-            <a:pPr algn="l" indent="0" marL="0">
+            <a:pPr eaLnBrk="0" algn="l" indent="0" marL="0">
               <a:buNone/>
             </a:pPr>
             <a:r>
@@ -7163,7 +7163,7 @@
           <a:bodyPr wrap="square" lIns="0" tIns="0" rIns="0" bIns="0" rtlCol="0" anchor="ctr"/>
           <a:lstStyle/>
           <a:p>
-            <a:pPr algn="ctr" indent="0" marL="0">
+            <a:pPr eaLnBrk="0" algn="ctr" indent="0" marL="0">
               <a:buNone/>
             </a:pPr>
             <a:r>
@@ -7202,7 +7202,7 @@
           <a:bodyPr wrap="square" lIns="0" tIns="0" rIns="0" bIns="0" rtlCol="0" anchor="ctr"/>
           <a:lstStyle/>
           <a:p>
-            <a:pPr algn="l" indent="0" marL="0">
+            <a:pPr eaLnBrk="0" algn="l" indent="0" marL="0">
               <a:buNone/>
             </a:pPr>
             <a:r>
@@ -7249,7 +7249,7 @@
           <a:bodyPr wrap="square" lIns="0" tIns="0" rIns="0" bIns="0" rtlCol="0" anchor="ctr"/>
           <a:lstStyle/>
           <a:p>
-            <a:pPr algn="ctr" indent="0" marL="0">
+            <a:pPr eaLnBrk="0" algn="ctr" indent="0" marL="0">
               <a:buNone/>
             </a:pPr>
             <a:r>
@@ -7288,7 +7288,7 @@
           <a:bodyPr wrap="square" lIns="0" tIns="0" rIns="0" bIns="0" rtlCol="0" anchor="ctr"/>
           <a:lstStyle/>
           <a:p>
-            <a:pPr algn="l" indent="0" marL="0">
+            <a:pPr eaLnBrk="0" algn="l" indent="0" marL="0">
               <a:buNone/>
             </a:pPr>
             <a:r>
@@ -7335,7 +7335,7 @@
           <a:bodyPr wrap="square" lIns="0" tIns="0" rIns="0" bIns="0" rtlCol="0" anchor="ctr"/>
           <a:lstStyle/>
           <a:p>
-            <a:pPr algn="ctr" indent="0" marL="0">
+            <a:pPr eaLnBrk="0" algn="ctr" indent="0" marL="0">
               <a:buNone/>
             </a:pPr>
             <a:r>
@@ -7374,7 +7374,7 @@
           <a:bodyPr wrap="square" lIns="0" tIns="0" rIns="0" bIns="0" rtlCol="0" anchor="ctr"/>
           <a:lstStyle/>
           <a:p>
-            <a:pPr algn="l" indent="0" marL="0">
+            <a:pPr eaLnBrk="0" algn="l" indent="0" marL="0">
               <a:buNone/>
             </a:pPr>
             <a:r>
@@ -7431,7 +7431,7 @@
             </a:lvl1pPr>
           </a:lstStyle>
           <a:p>
-            <a:pPr algn="r"/>
+            <a:pPr eaLnBrk="0" algn="r"/>
             <a:fld id="{F7021451-1387-4CA6-816F-3879F97B5CBC}" type="slidenum">
               <a:rPr b="0" lang="en-US"/>
               <a:t>6</a:t>
@@ -7488,7 +7488,7 @@
           <a:bodyPr wrap="square" lIns="0" tIns="0" rIns="0" bIns="0" rtlCol="0" anchor="ctr"/>
           <a:lstStyle/>
           <a:p>
-            <a:pPr algn="l" indent="0" marL="0">
+            <a:pPr eaLnBrk="0" algn="l" indent="0" marL="0">
               <a:buNone/>
             </a:pPr>
             <a:r>
@@ -7554,7 +7554,7 @@
           <a:bodyPr wrap="square" lIns="0" tIns="0" rIns="0" bIns="0" rtlCol="0" anchor="ctr"/>
           <a:lstStyle/>
           <a:p>
-            <a:pPr indent="0" marL="0">
+            <a:pPr eaLnBrk="0" indent="0" marL="0">
               <a:spcAft>
                 <a:spcPts val="600"/>
               </a:spcAft>
@@ -7623,7 +7623,7 @@
           <a:bodyPr wrap="square" lIns="0" tIns="0" rIns="0" bIns="0" rtlCol="0" anchor="ctr"/>
           <a:lstStyle/>
           <a:p>
-            <a:pPr indent="0" marL="0">
+            <a:pPr eaLnBrk="0" indent="0" marL="0">
               <a:spcAft>
                 <a:spcPts val="600"/>
               </a:spcAft>
@@ -7673,7 +7673,7 @@
           <a:bodyPr wrap="square" lIns="177800" tIns="0" rIns="177800" bIns="0" rtlCol="0" anchor="ctr"/>
           <a:lstStyle/>
           <a:p>
-            <a:pPr algn="l" indent="0" marL="0">
+            <a:pPr eaLnBrk="0" algn="l" indent="0" marL="0">
               <a:buNone/>
             </a:pPr>
             <a:r>
@@ -7712,7 +7712,7 @@
           <a:bodyPr wrap="square" lIns="0" tIns="0" rIns="0" bIns="0" rtlCol="0" anchor="t"/>
           <a:lstStyle/>
           <a:p>
-            <a:pPr algn="l" indent="0" marL="0">
+            <a:pPr eaLnBrk="0" algn="l" indent="0" marL="0">
               <a:buNone/>
             </a:pPr>
             <a:r>
@@ -7729,7 +7729,7 @@
             <a:endParaRPr lang="ko-KR" sz="3000" dirty="0"/>
           </a:p>
           <a:p>
-            <a:pPr algn="l" indent="0" marL="0">
+            <a:pPr eaLnBrk="0" algn="l" indent="0" marL="0">
               <a:buNone/>
             </a:pPr>
             <a:r>
@@ -7746,7 +7746,7 @@
             <a:endParaRPr lang="ko-KR" sz="3000" dirty="0"/>
           </a:p>
           <a:p>
-            <a:pPr algn="l" indent="0" marL="0">
+            <a:pPr eaLnBrk="0" algn="l" indent="0" marL="0">
               <a:buNone/>
             </a:pPr>
             <a:r>
@@ -7763,7 +7763,7 @@
             <a:endParaRPr lang="ko-KR" sz="3000" dirty="0"/>
           </a:p>
           <a:p>
-            <a:pPr algn="l" indent="0" marL="0">
+            <a:pPr eaLnBrk="0" algn="l" indent="0" marL="0">
               <a:buNone/>
             </a:pPr>
             <a:r>
@@ -7810,7 +7810,7 @@
           <a:bodyPr wrap="square" lIns="177800" tIns="0" rIns="177800" bIns="0" rtlCol="0" anchor="ctr"/>
           <a:lstStyle/>
           <a:p>
-            <a:pPr algn="l" indent="0" marL="0">
+            <a:pPr eaLnBrk="0" algn="l" indent="0" marL="0">
               <a:buNone/>
             </a:pPr>
             <a:r>
@@ -7849,7 +7849,7 @@
           <a:bodyPr wrap="square" lIns="0" tIns="0" rIns="0" bIns="0" rtlCol="0" anchor="t"/>
           <a:lstStyle/>
           <a:p>
-            <a:pPr algn="l" indent="0" marL="0">
+            <a:pPr eaLnBrk="0" algn="l" indent="0" marL="0">
               <a:buNone/>
             </a:pPr>
             <a:r>
@@ -7866,7 +7866,7 @@
             <a:endParaRPr lang="ko-KR" sz="3000" dirty="0"/>
           </a:p>
           <a:p>
-            <a:pPr algn="l" indent="0" marL="0">
+            <a:pPr eaLnBrk="0" algn="l" indent="0" marL="0">
               <a:buNone/>
             </a:pPr>
             <a:r>
@@ -7883,7 +7883,7 @@
             <a:endParaRPr lang="ko-KR" sz="3000" dirty="0"/>
           </a:p>
           <a:p>
-            <a:pPr algn="l" indent="0" marL="0">
+            <a:pPr eaLnBrk="0" algn="l" indent="0" marL="0">
               <a:buNone/>
             </a:pPr>
             <a:r>
@@ -7900,7 +7900,7 @@
             <a:endParaRPr lang="ko-KR" sz="3000" dirty="0"/>
           </a:p>
           <a:p>
-            <a:pPr algn="l" indent="0" marL="0">
+            <a:pPr eaLnBrk="0" algn="l" indent="0" marL="0">
               <a:buNone/>
             </a:pPr>
             <a:r>
@@ -7957,7 +7957,7 @@
             </a:lvl1pPr>
           </a:lstStyle>
           <a:p>
-            <a:pPr algn="r"/>
+            <a:pPr eaLnBrk="0" algn="r"/>
             <a:fld id="{F7021451-1387-4CA6-816F-3879F97B5CBC}" type="slidenum">
               <a:rPr b="0" lang="en-US"/>
               <a:t>7</a:t>
@@ -8014,7 +8014,7 @@
           <a:bodyPr wrap="square" lIns="0" tIns="0" rIns="0" bIns="0" rtlCol="0" anchor="ctr"/>
           <a:lstStyle/>
           <a:p>
-            <a:pPr algn="l" indent="0" marL="0">
+            <a:pPr eaLnBrk="0" algn="l" indent="0" marL="0">
               <a:buNone/>
             </a:pPr>
             <a:r>
@@ -8080,7 +8080,7 @@
           <a:bodyPr wrap="square" lIns="0" tIns="0" rIns="0" bIns="0" rtlCol="0" anchor="ctr"/>
           <a:lstStyle/>
           <a:p>
-            <a:pPr indent="0" marL="0">
+            <a:pPr eaLnBrk="0" indent="0" marL="0">
               <a:spcAft>
                 <a:spcPts val="600"/>
               </a:spcAft>
@@ -8100,7 +8100,7 @@
             <a:endParaRPr lang="ko-KR" sz="3000" dirty="0"/>
           </a:p>
           <a:p>
-            <a:pPr indent="0" marL="0">
+            <a:pPr eaLnBrk="0" indent="0" marL="0">
               <a:spcAft>
                 <a:spcPts val="600"/>
               </a:spcAft>
@@ -8120,7 +8120,7 @@
             <a:endParaRPr lang="ko-KR" sz="3000" dirty="0"/>
           </a:p>
           <a:p>
-            <a:pPr indent="0" marL="0">
+            <a:pPr eaLnBrk="0" indent="0" marL="0">
               <a:spcAft>
                 <a:spcPts val="600"/>
               </a:spcAft>
@@ -8140,7 +8140,7 @@
             <a:endParaRPr lang="ko-KR" sz="3000" dirty="0"/>
           </a:p>
           <a:p>
-            <a:pPr indent="0" marL="0">
+            <a:pPr eaLnBrk="0" indent="0" marL="0">
               <a:spcAft>
                 <a:spcPts val="600"/>
               </a:spcAft>
@@ -8160,7 +8160,7 @@
             <a:endParaRPr lang="ko-KR" sz="3000" dirty="0"/>
           </a:p>
           <a:p>
-            <a:pPr indent="0" marL="0">
+            <a:pPr eaLnBrk="0" indent="0" marL="0">
               <a:spcAft>
                 <a:spcPts val="600"/>
               </a:spcAft>
@@ -8208,7 +8208,7 @@
           <a:bodyPr wrap="square" lIns="0" tIns="0" rIns="0" bIns="0" rtlCol="0" anchor="ctr"/>
           <a:lstStyle/>
           <a:p>
-            <a:pPr algn="ctr" indent="0" marL="0">
+            <a:pPr eaLnBrk="0" algn="ctr" indent="0" marL="0">
               <a:buNone/>
             </a:pPr>
             <a:r>
@@ -8247,7 +8247,7 @@
           <a:bodyPr wrap="square" lIns="0" tIns="0" rIns="0" bIns="0" rtlCol="0" anchor="t"/>
           <a:lstStyle/>
           <a:p>
-            <a:pPr algn="l" indent="0" marL="0">
+            <a:pPr eaLnBrk="0" algn="l" indent="0" marL="0">
               <a:buNone/>
             </a:pPr>
             <a:r>
@@ -8292,7 +8292,7 @@
           <a:bodyPr wrap="square" lIns="0" tIns="0" rIns="0" bIns="0" rtlCol="0" anchor="ctr"/>
           <a:lstStyle/>
           <a:p>
-            <a:pPr algn="ctr" indent="0" marL="0">
+            <a:pPr eaLnBrk="0" algn="ctr" indent="0" marL="0">
               <a:buNone/>
             </a:pPr>
             <a:r>
@@ -8331,7 +8331,7 @@
           <a:bodyPr wrap="square" lIns="0" tIns="0" rIns="0" bIns="0" rtlCol="0" anchor="t"/>
           <a:lstStyle/>
           <a:p>
-            <a:pPr algn="l" indent="0" marL="0">
+            <a:pPr eaLnBrk="0" algn="l" indent="0" marL="0">
               <a:buNone/>
             </a:pPr>
             <a:r>
@@ -8376,7 +8376,7 @@
           <a:bodyPr wrap="square" lIns="0" tIns="0" rIns="0" bIns="0" rtlCol="0" anchor="ctr"/>
           <a:lstStyle/>
           <a:p>
-            <a:pPr algn="ctr" indent="0" marL="0">
+            <a:pPr eaLnBrk="0" algn="ctr" indent="0" marL="0">
               <a:buNone/>
             </a:pPr>
             <a:r>
@@ -8415,7 +8415,7 @@
           <a:bodyPr wrap="square" lIns="0" tIns="0" rIns="0" bIns="0" rtlCol="0" anchor="t"/>
           <a:lstStyle/>
           <a:p>
-            <a:pPr algn="l" indent="0" marL="0">
+            <a:pPr eaLnBrk="0" algn="l" indent="0" marL="0">
               <a:buNone/>
             </a:pPr>
             <a:r>
@@ -8472,7 +8472,7 @@
             </a:lvl1pPr>
           </a:lstStyle>
           <a:p>
-            <a:pPr algn="r"/>
+            <a:pPr eaLnBrk="0" algn="r"/>
             <a:fld id="{F7021451-1387-4CA6-816F-3879F97B5CBC}" type="slidenum">
               <a:rPr b="0" lang="en-US"/>
               <a:t>8</a:t>
@@ -8529,7 +8529,7 @@
           <a:bodyPr wrap="square" lIns="0" tIns="0" rIns="0" bIns="0" rtlCol="0" anchor="ctr"/>
           <a:lstStyle/>
           <a:p>
-            <a:pPr algn="l" indent="0" marL="0">
+            <a:pPr eaLnBrk="0" algn="l" indent="0" marL="0">
               <a:buNone/>
             </a:pPr>
             <a:r>
@@ -8568,7 +8568,7 @@
           <a:bodyPr wrap="square" lIns="0" tIns="0" rIns="0" bIns="0" rtlCol="0" anchor="ctr"/>
           <a:lstStyle/>
           <a:p>
-            <a:pPr algn="l" indent="0" marL="0">
+            <a:pPr eaLnBrk="0" algn="l" indent="0" marL="0">
               <a:buNone/>
             </a:pPr>
             <a:r>
@@ -8634,7 +8634,7 @@
           <a:bodyPr wrap="square" lIns="0" tIns="0" rIns="0" bIns="0" rtlCol="0" anchor="ctr"/>
           <a:lstStyle/>
           <a:p>
-            <a:pPr indent="0" marL="0">
+            <a:pPr eaLnBrk="0" indent="0" marL="0">
               <a:spcAft>
                 <a:spcPts val="600"/>
               </a:spcAft>
@@ -8703,7 +8703,7 @@
           <a:bodyPr wrap="square" lIns="0" tIns="0" rIns="0" bIns="0" rtlCol="0" anchor="ctr"/>
           <a:lstStyle/>
           <a:p>
-            <a:pPr indent="0" marL="0">
+            <a:pPr eaLnBrk="0" indent="0" marL="0">
               <a:spcAft>
                 <a:spcPts val="600"/>
               </a:spcAft>
@@ -8723,7 +8723,7 @@
             <a:endParaRPr lang="ko-KR" sz="3000" dirty="0"/>
           </a:p>
           <a:p>
-            <a:pPr indent="0" marL="0">
+            <a:pPr eaLnBrk="0" indent="0" marL="0">
               <a:spcAft>
                 <a:spcPts val="600"/>
               </a:spcAft>
@@ -8792,7 +8792,7 @@
           <a:bodyPr wrap="square" lIns="0" tIns="0" rIns="0" bIns="0" rtlCol="0" anchor="ctr"/>
           <a:lstStyle/>
           <a:p>
-            <a:pPr indent="0" marL="0">
+            <a:pPr eaLnBrk="0" indent="0" marL="0">
               <a:spcAft>
                 <a:spcPts val="600"/>
               </a:spcAft>
@@ -8812,7 +8812,7 @@
             <a:endParaRPr lang="ko-KR" sz="3000" dirty="0"/>
           </a:p>
           <a:p>
-            <a:pPr indent="0" marL="0">
+            <a:pPr eaLnBrk="0" indent="0" marL="0">
               <a:spcAft>
                 <a:spcPts val="600"/>
               </a:spcAft>
@@ -8881,7 +8881,7 @@
           <a:bodyPr wrap="square" lIns="0" tIns="0" rIns="0" bIns="0" rtlCol="0" anchor="ctr"/>
           <a:lstStyle/>
           <a:p>
-            <a:pPr indent="0" marL="0">
+            <a:pPr eaLnBrk="0" indent="0" marL="0">
               <a:spcAft>
                 <a:spcPts val="600"/>
               </a:spcAft>
@@ -8901,7 +8901,7 @@
             <a:endParaRPr lang="ko-KR" sz="3000" dirty="0"/>
           </a:p>
           <a:p>
-            <a:pPr indent="0" marL="0">
+            <a:pPr eaLnBrk="0" indent="0" marL="0">
               <a:spcAft>
                 <a:spcPts val="600"/>
               </a:spcAft>
@@ -8961,7 +8961,7 @@
             </a:lvl1pPr>
           </a:lstStyle>
           <a:p>
-            <a:pPr algn="r"/>
+            <a:pPr eaLnBrk="0" algn="r"/>
             <a:fld id="{F7021451-1387-4CA6-816F-3879F97B5CBC}" type="slidenum">
               <a:rPr b="0" lang="en-US"/>
               <a:t>9</a:t>

--- a/dist/초3/국어/발표와쓰기/초3_국어_발표와쓰기_01_조사한내용발표하기.pptx
+++ b/dist/초3/국어/발표와쓰기/초3_국어_발표와쓰기_01_조사한내용발표하기.pptx
@@ -119,39 +119,39 @@
   <p:extLst>
     <p:ext uri="{521415D9-36F7-43E2-AB2F-B90AF26B5E84}">
       <p14:sectionLst xmlns:p14="http://schemas.microsoft.com/office/powerpoint/2010/main">
-        <p14:section name="도입" id="{693bec3d-73d8-5a8e-a887-6a554ccc16e9}">
+        <p14:section name="도입" id="{840fe8ec-62f2-ce55-1415-f1fe38563138}">
           <p14:sldIdLst>
             <p14:sldId id="256"/>
             <p14:sldId id="257"/>
           </p14:sldIdLst>
         </p14:section>
-        <p14:section name="개념" id="{68b7e1fd-1f8b-f387-8d91-20b9cd0f7c3f}">
+        <p14:section name="개념" id="{e5e09054-eab1-e0b0-6ea7-ca751f87c1ac}">
           <p14:sldIdLst>
             <p14:sldId id="258"/>
             <p14:sldId id="259"/>
             <p14:sldId id="260"/>
           </p14:sldIdLst>
         </p14:section>
-        <p14:section name="연습" id="{610a61f5-255c-dc86-056f-6d014d31f760}">
+        <p14:section name="연습" id="{e5dd24d6-07e1-166d-7610-d45b99f0674a}">
           <p14:sldIdLst>
             <p14:sldId id="261"/>
             <p14:sldId id="262"/>
             <p14:sldId id="263"/>
           </p14:sldIdLst>
         </p14:section>
-        <p14:section name="확인" id="{89c28190-0698-d40a-9ef0-974778346167}">
+        <p14:section name="확인" id="{0dee9e48-e238-e10e-5dd4-19af4ff2e838}">
           <p14:sldIdLst>
             <p14:sldId id="264"/>
             <p14:sldId id="265"/>
             <p14:sldId id="266"/>
           </p14:sldIdLst>
         </p14:section>
-        <p14:section name="정리" id="{ac93d317-9d36-8917-73c2-89e2d7cecfa0}">
+        <p14:section name="정리" id="{149586bc-8c31-9ab1-4bfb-e56879837247}">
           <p14:sldIdLst>
             <p14:sldId id="267"/>
           </p14:sldIdLst>
         </p14:section>
-        <p14:section name="보충" id="{8a79616c-c70b-fa8f-a6e8-1b2e25098bd6}">
+        <p14:section name="보충" id="{d6f38f7f-25e0-7da8-59ab-b8496e5b7108}">
           <p14:sldIdLst>
             <p14:sldId id="268"/>
           </p14:sldIdLst>

--- a/dist/초3/국어/발표와쓰기/초3_국어_발표와쓰기_01_조사한내용발표하기.pptx
+++ b/dist/초3/국어/발표와쓰기/초3_국어_발표와쓰기_01_조사한내용발표하기.pptx
@@ -119,39 +119,39 @@
   <p:extLst>
     <p:ext uri="{521415D9-36F7-43E2-AB2F-B90AF26B5E84}">
       <p14:sectionLst xmlns:p14="http://schemas.microsoft.com/office/powerpoint/2010/main">
-        <p14:section name="도입" id="{840fe8ec-62f2-ce55-1415-f1fe38563138}">
+        <p14:section name="도입" id="{ba5f4483-1490-7eb6-268a-daf37f6aef23}">
           <p14:sldIdLst>
             <p14:sldId id="256"/>
             <p14:sldId id="257"/>
           </p14:sldIdLst>
         </p14:section>
-        <p14:section name="개념" id="{e5e09054-eab1-e0b0-6ea7-ca751f87c1ac}">
+        <p14:section name="개념" id="{80a4fc54-c01e-84c9-72fc-28998bc24d28}">
           <p14:sldIdLst>
             <p14:sldId id="258"/>
             <p14:sldId id="259"/>
             <p14:sldId id="260"/>
           </p14:sldIdLst>
         </p14:section>
-        <p14:section name="연습" id="{e5dd24d6-07e1-166d-7610-d45b99f0674a}">
+        <p14:section name="연습" id="{8641c344-a411-ef86-8e0e-8e18ce010c76}">
           <p14:sldIdLst>
             <p14:sldId id="261"/>
             <p14:sldId id="262"/>
             <p14:sldId id="263"/>
           </p14:sldIdLst>
         </p14:section>
-        <p14:section name="확인" id="{0dee9e48-e238-e10e-5dd4-19af4ff2e838}">
+        <p14:section name="확인" id="{f2cadac0-cf3c-8afe-dab0-4953a45da296}">
           <p14:sldIdLst>
             <p14:sldId id="264"/>
             <p14:sldId id="265"/>
             <p14:sldId id="266"/>
           </p14:sldIdLst>
         </p14:section>
-        <p14:section name="정리" id="{149586bc-8c31-9ab1-4bfb-e56879837247}">
+        <p14:section name="정리" id="{8f749178-0083-144c-9ac9-00ad9c913d65}">
           <p14:sldIdLst>
             <p14:sldId id="267"/>
           </p14:sldIdLst>
         </p14:section>
-        <p14:section name="보충" id="{d6f38f7f-25e0-7da8-59ab-b8496e5b7108}">
+        <p14:section name="보충" id="{81f24234-7ef4-543e-b473-2f6766d2c5ce}">
           <p14:sldIdLst>
             <p14:sldId id="268"/>
           </p14:sldIdLst>
@@ -968,7 +968,7 @@
 - 예: “안녕하세요? 저는 강아지를 조사했습니다. …… 들어 주셔서 고맙습니다.” (처음 틀과 끝 틀을 모두 말하면 맞음)
 막히면
 - 부모가 한 마디씩 끊어 말하고 아이가 따라 하게 합니다.
-- 이 차시는 계획상 바로 앞 차시가 없습니다. 높임 말투가 많이 어려우면 2학년 ‘바르고 고운 말’(KR22-G02-KOR-POLITE-L01)을, 차례대로 말하기가 어려우면 ‘일이 일어난 차례’(KR22-G02-KOR-SEQUENCE-L01)를 먼저 합니다.
+- 높임 말투가 많이 어려우면 2학년 ‘바르고 고운 말’(KR22-G02-KOR-POLITE-L01)을, 차례대로 말하기가 어려우면 ‘일이 일어난 차례’(KR22-G02-KOR-SEQUENCE-L01)를 먼저 합니다.
 주의
 - 보충이 오래 걸리면 오늘은 여기까지 하고 다음 날 S02부터 다시 시작합니다.</a:t>
             </a:r>
@@ -1059,7 +1059,7 @@
             <a:r>
               <a:rPr lang="en-US" dirty="0"/>
               <a:t>[S02 · 선수 학습 확인(발표하는 말투)]
-목적: 발표에 쓰는 높임 말투(‘-습니다’, ‘-요’)를 쓸 수 있는지 확인합니다. 이 차시는 계획상 바로 앞 차시가 없으므로, 2학년 ‘바르고 고운 말’(KR22-G02-KOR-POLITE-L01)에서 배운 말투를 확인합니다.
+목적: 발표에 쓰는 높임 말투(‘-습니다’, ‘-요’)를 쓸 수 있는지 확인합니다. 앞 차시와 2학년 ‘바르고 고운 말’(KR22-G02-KOR-POLITE-L01)에서 배운 말투를 확인합니다.
 시간: 약 3분
 이렇게 말해 보세요
 - “여러 사람 앞에서 발표할 때는 어떻게 말할까? ①을 발표하는 말로 바꿔 볼래?”
